--- a/是你最重要.pptx
+++ b/是你最重要.pptx
@@ -173,7 +173,7 @@
           <a:lstStyle/>
           <a:p>
             <a:r>
-              <a:rPr lang="en-US" altLang="zh-TW" smtClean="0"/>
+              <a:rPr lang="en-US" altLang="zh-TW"/>
               <a:t>Click to edit Master title style</a:t>
             </a:r>
             <a:endParaRPr lang="zh-TW" altLang="en-US"/>
@@ -292,7 +292,7 @@
           </a:lstStyle>
           <a:p>
             <a:r>
-              <a:rPr lang="en-US" altLang="zh-TW" smtClean="0"/>
+              <a:rPr lang="en-US" altLang="zh-TW"/>
               <a:t>Click to edit Master subtitle style</a:t>
             </a:r>
             <a:endParaRPr lang="zh-TW" altLang="en-US"/>
@@ -317,7 +317,7 @@
             <a:fld id="{4D01326C-6BDE-41C6-AB6C-A143C8DE5B6D}" type="datetimeFigureOut">
               <a:rPr lang="zh-TW" altLang="en-US" smtClean="0"/>
               <a:pPr/>
-              <a:t>2020/11/7</a:t>
+              <a:t>2025/9/29</a:t>
             </a:fld>
             <a:endParaRPr lang="zh-TW" altLang="en-US"/>
           </a:p>
@@ -412,7 +412,7 @@
           <a:lstStyle/>
           <a:p>
             <a:r>
-              <a:rPr lang="en-US" altLang="zh-TW" smtClean="0"/>
+              <a:rPr lang="en-US" altLang="zh-TW"/>
               <a:t>Click to edit Master title style</a:t>
             </a:r>
             <a:endParaRPr lang="zh-TW" altLang="en-US"/>
@@ -436,35 +436,35 @@
           <a:p>
             <a:pPr lvl="0"/>
             <a:r>
-              <a:rPr lang="en-US" altLang="zh-TW" smtClean="0"/>
+              <a:rPr lang="en-US" altLang="zh-TW"/>
               <a:t>Edit Master text styles</a:t>
             </a:r>
           </a:p>
           <a:p>
             <a:pPr lvl="1"/>
             <a:r>
-              <a:rPr lang="en-US" altLang="zh-TW" smtClean="0"/>
+              <a:rPr lang="en-US" altLang="zh-TW"/>
               <a:t>Second level</a:t>
             </a:r>
           </a:p>
           <a:p>
             <a:pPr lvl="2"/>
             <a:r>
-              <a:rPr lang="en-US" altLang="zh-TW" smtClean="0"/>
+              <a:rPr lang="en-US" altLang="zh-TW"/>
               <a:t>Third level</a:t>
             </a:r>
           </a:p>
           <a:p>
             <a:pPr lvl="3"/>
             <a:r>
-              <a:rPr lang="en-US" altLang="zh-TW" smtClean="0"/>
+              <a:rPr lang="en-US" altLang="zh-TW"/>
               <a:t>Fourth level</a:t>
             </a:r>
           </a:p>
           <a:p>
             <a:pPr lvl="4"/>
             <a:r>
-              <a:rPr lang="en-US" altLang="zh-TW" smtClean="0"/>
+              <a:rPr lang="en-US" altLang="zh-TW"/>
               <a:t>Fifth level</a:t>
             </a:r>
             <a:endParaRPr lang="zh-TW" altLang="en-US"/>
@@ -489,7 +489,7 @@
             <a:fld id="{4D01326C-6BDE-41C6-AB6C-A143C8DE5B6D}" type="datetimeFigureOut">
               <a:rPr lang="zh-TW" altLang="en-US" smtClean="0"/>
               <a:pPr/>
-              <a:t>2020/11/7</a:t>
+              <a:t>2025/9/29</a:t>
             </a:fld>
             <a:endParaRPr lang="zh-TW" altLang="en-US"/>
           </a:p>
@@ -589,7 +589,7 @@
           <a:lstStyle/>
           <a:p>
             <a:r>
-              <a:rPr lang="en-US" altLang="zh-TW" smtClean="0"/>
+              <a:rPr lang="en-US" altLang="zh-TW"/>
               <a:t>Click to edit Master title style</a:t>
             </a:r>
             <a:endParaRPr lang="zh-TW" altLang="en-US"/>
@@ -618,35 +618,35 @@
           <a:p>
             <a:pPr lvl="0"/>
             <a:r>
-              <a:rPr lang="en-US" altLang="zh-TW" smtClean="0"/>
+              <a:rPr lang="en-US" altLang="zh-TW"/>
               <a:t>Edit Master text styles</a:t>
             </a:r>
           </a:p>
           <a:p>
             <a:pPr lvl="1"/>
             <a:r>
-              <a:rPr lang="en-US" altLang="zh-TW" smtClean="0"/>
+              <a:rPr lang="en-US" altLang="zh-TW"/>
               <a:t>Second level</a:t>
             </a:r>
           </a:p>
           <a:p>
             <a:pPr lvl="2"/>
             <a:r>
-              <a:rPr lang="en-US" altLang="zh-TW" smtClean="0"/>
+              <a:rPr lang="en-US" altLang="zh-TW"/>
               <a:t>Third level</a:t>
             </a:r>
           </a:p>
           <a:p>
             <a:pPr lvl="3"/>
             <a:r>
-              <a:rPr lang="en-US" altLang="zh-TW" smtClean="0"/>
+              <a:rPr lang="en-US" altLang="zh-TW"/>
               <a:t>Fourth level</a:t>
             </a:r>
           </a:p>
           <a:p>
             <a:pPr lvl="4"/>
             <a:r>
-              <a:rPr lang="en-US" altLang="zh-TW" smtClean="0"/>
+              <a:rPr lang="en-US" altLang="zh-TW"/>
               <a:t>Fifth level</a:t>
             </a:r>
             <a:endParaRPr lang="zh-TW" altLang="en-US"/>
@@ -671,7 +671,7 @@
             <a:fld id="{4D01326C-6BDE-41C6-AB6C-A143C8DE5B6D}" type="datetimeFigureOut">
               <a:rPr lang="zh-TW" altLang="en-US" smtClean="0"/>
               <a:pPr/>
-              <a:t>2020/11/7</a:t>
+              <a:t>2025/9/29</a:t>
             </a:fld>
             <a:endParaRPr lang="zh-TW" altLang="en-US"/>
           </a:p>
@@ -766,7 +766,7 @@
           <a:lstStyle/>
           <a:p>
             <a:r>
-              <a:rPr lang="en-US" altLang="zh-TW" smtClean="0"/>
+              <a:rPr lang="en-US" altLang="zh-TW"/>
               <a:t>Click to edit Master title style</a:t>
             </a:r>
             <a:endParaRPr lang="zh-TW" altLang="en-US"/>
@@ -790,35 +790,35 @@
           <a:p>
             <a:pPr lvl="0"/>
             <a:r>
-              <a:rPr lang="en-US" altLang="zh-TW" smtClean="0"/>
+              <a:rPr lang="en-US" altLang="zh-TW"/>
               <a:t>Edit Master text styles</a:t>
             </a:r>
           </a:p>
           <a:p>
             <a:pPr lvl="1"/>
             <a:r>
-              <a:rPr lang="en-US" altLang="zh-TW" smtClean="0"/>
+              <a:rPr lang="en-US" altLang="zh-TW"/>
               <a:t>Second level</a:t>
             </a:r>
           </a:p>
           <a:p>
             <a:pPr lvl="2"/>
             <a:r>
-              <a:rPr lang="en-US" altLang="zh-TW" smtClean="0"/>
+              <a:rPr lang="en-US" altLang="zh-TW"/>
               <a:t>Third level</a:t>
             </a:r>
           </a:p>
           <a:p>
             <a:pPr lvl="3"/>
             <a:r>
-              <a:rPr lang="en-US" altLang="zh-TW" smtClean="0"/>
+              <a:rPr lang="en-US" altLang="zh-TW"/>
               <a:t>Fourth level</a:t>
             </a:r>
           </a:p>
           <a:p>
             <a:pPr lvl="4"/>
             <a:r>
-              <a:rPr lang="en-US" altLang="zh-TW" smtClean="0"/>
+              <a:rPr lang="en-US" altLang="zh-TW"/>
               <a:t>Fifth level</a:t>
             </a:r>
             <a:endParaRPr lang="zh-TW" altLang="en-US"/>
@@ -843,7 +843,7 @@
             <a:fld id="{4D01326C-6BDE-41C6-AB6C-A143C8DE5B6D}" type="datetimeFigureOut">
               <a:rPr lang="zh-TW" altLang="en-US" smtClean="0"/>
               <a:pPr/>
-              <a:t>2020/11/7</a:t>
+              <a:t>2025/9/29</a:t>
             </a:fld>
             <a:endParaRPr lang="zh-TW" altLang="en-US"/>
           </a:p>
@@ -947,7 +947,7 @@
           </a:lstStyle>
           <a:p>
             <a:r>
-              <a:rPr lang="en-US" altLang="zh-TW" smtClean="0"/>
+              <a:rPr lang="en-US" altLang="zh-TW"/>
               <a:t>Click to edit Master title style</a:t>
             </a:r>
             <a:endParaRPr lang="zh-TW" altLang="en-US"/>
@@ -1067,7 +1067,7 @@
           <a:p>
             <a:pPr lvl="0"/>
             <a:r>
-              <a:rPr lang="en-US" altLang="zh-TW" smtClean="0"/>
+              <a:rPr lang="en-US" altLang="zh-TW"/>
               <a:t>Edit Master text styles</a:t>
             </a:r>
           </a:p>
@@ -1091,7 +1091,7 @@
             <a:fld id="{4D01326C-6BDE-41C6-AB6C-A143C8DE5B6D}" type="datetimeFigureOut">
               <a:rPr lang="zh-TW" altLang="en-US" smtClean="0"/>
               <a:pPr/>
-              <a:t>2020/11/7</a:t>
+              <a:t>2025/9/29</a:t>
             </a:fld>
             <a:endParaRPr lang="zh-TW" altLang="en-US"/>
           </a:p>
@@ -1186,7 +1186,7 @@
           <a:lstStyle/>
           <a:p>
             <a:r>
-              <a:rPr lang="en-US" altLang="zh-TW" smtClean="0"/>
+              <a:rPr lang="en-US" altLang="zh-TW"/>
               <a:t>Click to edit Master title style</a:t>
             </a:r>
             <a:endParaRPr lang="zh-TW" altLang="en-US"/>
@@ -1243,35 +1243,35 @@
           <a:p>
             <a:pPr lvl="0"/>
             <a:r>
-              <a:rPr lang="en-US" altLang="zh-TW" smtClean="0"/>
+              <a:rPr lang="en-US" altLang="zh-TW"/>
               <a:t>Edit Master text styles</a:t>
             </a:r>
           </a:p>
           <a:p>
             <a:pPr lvl="1"/>
             <a:r>
-              <a:rPr lang="en-US" altLang="zh-TW" smtClean="0"/>
+              <a:rPr lang="en-US" altLang="zh-TW"/>
               <a:t>Second level</a:t>
             </a:r>
           </a:p>
           <a:p>
             <a:pPr lvl="2"/>
             <a:r>
-              <a:rPr lang="en-US" altLang="zh-TW" smtClean="0"/>
+              <a:rPr lang="en-US" altLang="zh-TW"/>
               <a:t>Third level</a:t>
             </a:r>
           </a:p>
           <a:p>
             <a:pPr lvl="3"/>
             <a:r>
-              <a:rPr lang="en-US" altLang="zh-TW" smtClean="0"/>
+              <a:rPr lang="en-US" altLang="zh-TW"/>
               <a:t>Fourth level</a:t>
             </a:r>
           </a:p>
           <a:p>
             <a:pPr lvl="4"/>
             <a:r>
-              <a:rPr lang="en-US" altLang="zh-TW" smtClean="0"/>
+              <a:rPr lang="en-US" altLang="zh-TW"/>
               <a:t>Fifth level</a:t>
             </a:r>
             <a:endParaRPr lang="zh-TW" altLang="en-US"/>
@@ -1328,35 +1328,35 @@
           <a:p>
             <a:pPr lvl="0"/>
             <a:r>
-              <a:rPr lang="en-US" altLang="zh-TW" smtClean="0"/>
+              <a:rPr lang="en-US" altLang="zh-TW"/>
               <a:t>Edit Master text styles</a:t>
             </a:r>
           </a:p>
           <a:p>
             <a:pPr lvl="1"/>
             <a:r>
-              <a:rPr lang="en-US" altLang="zh-TW" smtClean="0"/>
+              <a:rPr lang="en-US" altLang="zh-TW"/>
               <a:t>Second level</a:t>
             </a:r>
           </a:p>
           <a:p>
             <a:pPr lvl="2"/>
             <a:r>
-              <a:rPr lang="en-US" altLang="zh-TW" smtClean="0"/>
+              <a:rPr lang="en-US" altLang="zh-TW"/>
               <a:t>Third level</a:t>
             </a:r>
           </a:p>
           <a:p>
             <a:pPr lvl="3"/>
             <a:r>
-              <a:rPr lang="en-US" altLang="zh-TW" smtClean="0"/>
+              <a:rPr lang="en-US" altLang="zh-TW"/>
               <a:t>Fourth level</a:t>
             </a:r>
           </a:p>
           <a:p>
             <a:pPr lvl="4"/>
             <a:r>
-              <a:rPr lang="en-US" altLang="zh-TW" smtClean="0"/>
+              <a:rPr lang="en-US" altLang="zh-TW"/>
               <a:t>Fifth level</a:t>
             </a:r>
             <a:endParaRPr lang="zh-TW" altLang="en-US"/>
@@ -1381,7 +1381,7 @@
             <a:fld id="{4D01326C-6BDE-41C6-AB6C-A143C8DE5B6D}" type="datetimeFigureOut">
               <a:rPr lang="zh-TW" altLang="en-US" smtClean="0"/>
               <a:pPr/>
-              <a:t>2020/11/7</a:t>
+              <a:t>2025/9/29</a:t>
             </a:fld>
             <a:endParaRPr lang="zh-TW" altLang="en-US"/>
           </a:p>
@@ -1480,7 +1480,7 @@
           </a:lstStyle>
           <a:p>
             <a:r>
-              <a:rPr lang="en-US" altLang="zh-TW" smtClean="0"/>
+              <a:rPr lang="en-US" altLang="zh-TW"/>
               <a:t>Click to edit Master title style</a:t>
             </a:r>
             <a:endParaRPr lang="zh-TW" altLang="en-US"/>
@@ -1546,7 +1546,7 @@
           <a:p>
             <a:pPr lvl="0"/>
             <a:r>
-              <a:rPr lang="en-US" altLang="zh-TW" smtClean="0"/>
+              <a:rPr lang="en-US" altLang="zh-TW"/>
               <a:t>Edit Master text styles</a:t>
             </a:r>
           </a:p>
@@ -1602,35 +1602,35 @@
           <a:p>
             <a:pPr lvl="0"/>
             <a:r>
-              <a:rPr lang="en-US" altLang="zh-TW" smtClean="0"/>
+              <a:rPr lang="en-US" altLang="zh-TW"/>
               <a:t>Edit Master text styles</a:t>
             </a:r>
           </a:p>
           <a:p>
             <a:pPr lvl="1"/>
             <a:r>
-              <a:rPr lang="en-US" altLang="zh-TW" smtClean="0"/>
+              <a:rPr lang="en-US" altLang="zh-TW"/>
               <a:t>Second level</a:t>
             </a:r>
           </a:p>
           <a:p>
             <a:pPr lvl="2"/>
             <a:r>
-              <a:rPr lang="en-US" altLang="zh-TW" smtClean="0"/>
+              <a:rPr lang="en-US" altLang="zh-TW"/>
               <a:t>Third level</a:t>
             </a:r>
           </a:p>
           <a:p>
             <a:pPr lvl="3"/>
             <a:r>
-              <a:rPr lang="en-US" altLang="zh-TW" smtClean="0"/>
+              <a:rPr lang="en-US" altLang="zh-TW"/>
               <a:t>Fourth level</a:t>
             </a:r>
           </a:p>
           <a:p>
             <a:pPr lvl="4"/>
             <a:r>
-              <a:rPr lang="en-US" altLang="zh-TW" smtClean="0"/>
+              <a:rPr lang="en-US" altLang="zh-TW"/>
               <a:t>Fifth level</a:t>
             </a:r>
             <a:endParaRPr lang="zh-TW" altLang="en-US"/>
@@ -1696,7 +1696,7 @@
           <a:p>
             <a:pPr lvl="0"/>
             <a:r>
-              <a:rPr lang="en-US" altLang="zh-TW" smtClean="0"/>
+              <a:rPr lang="en-US" altLang="zh-TW"/>
               <a:t>Edit Master text styles</a:t>
             </a:r>
           </a:p>
@@ -1752,35 +1752,35 @@
           <a:p>
             <a:pPr lvl="0"/>
             <a:r>
-              <a:rPr lang="en-US" altLang="zh-TW" smtClean="0"/>
+              <a:rPr lang="en-US" altLang="zh-TW"/>
               <a:t>Edit Master text styles</a:t>
             </a:r>
           </a:p>
           <a:p>
             <a:pPr lvl="1"/>
             <a:r>
-              <a:rPr lang="en-US" altLang="zh-TW" smtClean="0"/>
+              <a:rPr lang="en-US" altLang="zh-TW"/>
               <a:t>Second level</a:t>
             </a:r>
           </a:p>
           <a:p>
             <a:pPr lvl="2"/>
             <a:r>
-              <a:rPr lang="en-US" altLang="zh-TW" smtClean="0"/>
+              <a:rPr lang="en-US" altLang="zh-TW"/>
               <a:t>Third level</a:t>
             </a:r>
           </a:p>
           <a:p>
             <a:pPr lvl="3"/>
             <a:r>
-              <a:rPr lang="en-US" altLang="zh-TW" smtClean="0"/>
+              <a:rPr lang="en-US" altLang="zh-TW"/>
               <a:t>Fourth level</a:t>
             </a:r>
           </a:p>
           <a:p>
             <a:pPr lvl="4"/>
             <a:r>
-              <a:rPr lang="en-US" altLang="zh-TW" smtClean="0"/>
+              <a:rPr lang="en-US" altLang="zh-TW"/>
               <a:t>Fifth level</a:t>
             </a:r>
             <a:endParaRPr lang="zh-TW" altLang="en-US"/>
@@ -1805,7 +1805,7 @@
             <a:fld id="{4D01326C-6BDE-41C6-AB6C-A143C8DE5B6D}" type="datetimeFigureOut">
               <a:rPr lang="zh-TW" altLang="en-US" smtClean="0"/>
               <a:pPr/>
-              <a:t>2020/11/7</a:t>
+              <a:t>2025/9/29</a:t>
             </a:fld>
             <a:endParaRPr lang="zh-TW" altLang="en-US"/>
           </a:p>
@@ -1900,7 +1900,7 @@
           <a:lstStyle/>
           <a:p>
             <a:r>
-              <a:rPr lang="en-US" altLang="zh-TW" smtClean="0"/>
+              <a:rPr lang="en-US" altLang="zh-TW"/>
               <a:t>Click to edit Master title style</a:t>
             </a:r>
             <a:endParaRPr lang="zh-TW" altLang="en-US"/>
@@ -1925,7 +1925,7 @@
             <a:fld id="{4D01326C-6BDE-41C6-AB6C-A143C8DE5B6D}" type="datetimeFigureOut">
               <a:rPr lang="zh-TW" altLang="en-US" smtClean="0"/>
               <a:pPr/>
-              <a:t>2020/11/7</a:t>
+              <a:t>2025/9/29</a:t>
             </a:fld>
             <a:endParaRPr lang="zh-TW" altLang="en-US"/>
           </a:p>
@@ -2022,7 +2022,7 @@
             <a:fld id="{4D01326C-6BDE-41C6-AB6C-A143C8DE5B6D}" type="datetimeFigureOut">
               <a:rPr lang="zh-TW" altLang="en-US" smtClean="0"/>
               <a:pPr/>
-              <a:t>2020/11/7</a:t>
+              <a:t>2025/9/29</a:t>
             </a:fld>
             <a:endParaRPr lang="zh-TW" altLang="en-US"/>
           </a:p>
@@ -2126,7 +2126,7 @@
           </a:lstStyle>
           <a:p>
             <a:r>
-              <a:rPr lang="en-US" altLang="zh-TW" smtClean="0"/>
+              <a:rPr lang="en-US" altLang="zh-TW"/>
               <a:t>Click to edit Master title style</a:t>
             </a:r>
             <a:endParaRPr lang="zh-TW" altLang="en-US"/>
@@ -2183,35 +2183,35 @@
           <a:p>
             <a:pPr lvl="0"/>
             <a:r>
-              <a:rPr lang="en-US" altLang="zh-TW" smtClean="0"/>
+              <a:rPr lang="en-US" altLang="zh-TW"/>
               <a:t>Edit Master text styles</a:t>
             </a:r>
           </a:p>
           <a:p>
             <a:pPr lvl="1"/>
             <a:r>
-              <a:rPr lang="en-US" altLang="zh-TW" smtClean="0"/>
+              <a:rPr lang="en-US" altLang="zh-TW"/>
               <a:t>Second level</a:t>
             </a:r>
           </a:p>
           <a:p>
             <a:pPr lvl="2"/>
             <a:r>
-              <a:rPr lang="en-US" altLang="zh-TW" smtClean="0"/>
+              <a:rPr lang="en-US" altLang="zh-TW"/>
               <a:t>Third level</a:t>
             </a:r>
           </a:p>
           <a:p>
             <a:pPr lvl="3"/>
             <a:r>
-              <a:rPr lang="en-US" altLang="zh-TW" smtClean="0"/>
+              <a:rPr lang="en-US" altLang="zh-TW"/>
               <a:t>Fourth level</a:t>
             </a:r>
           </a:p>
           <a:p>
             <a:pPr lvl="4"/>
             <a:r>
-              <a:rPr lang="en-US" altLang="zh-TW" smtClean="0"/>
+              <a:rPr lang="en-US" altLang="zh-TW"/>
               <a:t>Fifth level</a:t>
             </a:r>
             <a:endParaRPr lang="zh-TW" altLang="en-US"/>
@@ -2277,7 +2277,7 @@
           <a:p>
             <a:pPr lvl="0"/>
             <a:r>
-              <a:rPr lang="en-US" altLang="zh-TW" smtClean="0"/>
+              <a:rPr lang="en-US" altLang="zh-TW"/>
               <a:t>Edit Master text styles</a:t>
             </a:r>
           </a:p>
@@ -2301,7 +2301,7 @@
             <a:fld id="{4D01326C-6BDE-41C6-AB6C-A143C8DE5B6D}" type="datetimeFigureOut">
               <a:rPr lang="zh-TW" altLang="en-US" smtClean="0"/>
               <a:pPr/>
-              <a:t>2020/11/7</a:t>
+              <a:t>2025/9/29</a:t>
             </a:fld>
             <a:endParaRPr lang="zh-TW" altLang="en-US"/>
           </a:p>
@@ -2405,7 +2405,7 @@
           </a:lstStyle>
           <a:p>
             <a:r>
-              <a:rPr lang="en-US" altLang="zh-TW" smtClean="0"/>
+              <a:rPr lang="en-US" altLang="zh-TW"/>
               <a:t>Click to edit Master title style</a:t>
             </a:r>
             <a:endParaRPr lang="zh-TW" altLang="en-US"/>
@@ -2470,7 +2470,7 @@
           </a:lstStyle>
           <a:p>
             <a:r>
-              <a:rPr lang="en-US" altLang="zh-TW" smtClean="0"/>
+              <a:rPr lang="en-US" altLang="zh-TW"/>
               <a:t>Click icon to add picture</a:t>
             </a:r>
             <a:endParaRPr lang="zh-TW" altLang="en-US"/>
@@ -2536,7 +2536,7 @@
           <a:p>
             <a:pPr lvl="0"/>
             <a:r>
-              <a:rPr lang="en-US" altLang="zh-TW" smtClean="0"/>
+              <a:rPr lang="en-US" altLang="zh-TW"/>
               <a:t>Edit Master text styles</a:t>
             </a:r>
           </a:p>
@@ -2560,7 +2560,7 @@
             <a:fld id="{4D01326C-6BDE-41C6-AB6C-A143C8DE5B6D}" type="datetimeFigureOut">
               <a:rPr lang="zh-TW" altLang="en-US" smtClean="0"/>
               <a:pPr/>
-              <a:t>2020/11/7</a:t>
+              <a:t>2025/9/29</a:t>
             </a:fld>
             <a:endParaRPr lang="zh-TW" altLang="en-US"/>
           </a:p>
@@ -2675,10 +2675,9 @@
           <a:lstStyle/>
           <a:p>
             <a:r>
-              <a:rPr lang="zh-TW" altLang="en-US" smtClean="0"/>
+              <a:rPr lang="zh-TW" altLang="en-US"/>
               <a:t>按一下以編輯母片標題樣式</a:t>
             </a:r>
-            <a:endParaRPr lang="zh-TW" altLang="en-US"/>
           </a:p>
         </p:txBody>
       </p:sp>
@@ -2709,38 +2708,37 @@
           <a:p>
             <a:pPr lvl="0"/>
             <a:r>
-              <a:rPr lang="zh-TW" altLang="en-US" smtClean="0"/>
+              <a:rPr lang="zh-TW" altLang="en-US"/>
               <a:t>按一下以編輯母片文字樣式</a:t>
             </a:r>
           </a:p>
           <a:p>
             <a:pPr lvl="1"/>
             <a:r>
-              <a:rPr lang="zh-TW" altLang="en-US" smtClean="0"/>
+              <a:rPr lang="zh-TW" altLang="en-US"/>
               <a:t>第二層</a:t>
             </a:r>
           </a:p>
           <a:p>
             <a:pPr lvl="2"/>
             <a:r>
-              <a:rPr lang="zh-TW" altLang="en-US" smtClean="0"/>
+              <a:rPr lang="zh-TW" altLang="en-US"/>
               <a:t>第三層</a:t>
             </a:r>
           </a:p>
           <a:p>
             <a:pPr lvl="3"/>
             <a:r>
-              <a:rPr lang="zh-TW" altLang="en-US" smtClean="0"/>
+              <a:rPr lang="zh-TW" altLang="en-US"/>
               <a:t>第四層</a:t>
             </a:r>
           </a:p>
           <a:p>
             <a:pPr lvl="4"/>
             <a:r>
-              <a:rPr lang="zh-TW" altLang="en-US" smtClean="0"/>
+              <a:rPr lang="zh-TW" altLang="en-US"/>
               <a:t>第五層</a:t>
             </a:r>
-            <a:endParaRPr lang="zh-TW" altLang="en-US"/>
           </a:p>
         </p:txBody>
       </p:sp>
@@ -2780,7 +2778,7 @@
             <a:fld id="{4D01326C-6BDE-41C6-AB6C-A143C8DE5B6D}" type="datetimeFigureOut">
               <a:rPr lang="zh-TW" altLang="en-US" smtClean="0"/>
               <a:pPr/>
-              <a:t>2020/11/7</a:t>
+              <a:t>2025/9/29</a:t>
             </a:fld>
             <a:endParaRPr lang="zh-TW" altLang="en-US"/>
           </a:p>
@@ -3210,7 +3208,7 @@
                 <a:latin typeface="微軟正黑體" pitchFamily="34" charset="-120"/>
                 <a:ea typeface="微軟正黑體" pitchFamily="34" charset="-120"/>
               </a:rPr>
-              <a:t>袮</a:t>
+              <a:t>祢</a:t>
             </a:r>
             <a:r>
               <a:rPr lang="zh-TW" altLang="en-US" sz="7200" b="1" i="1" dirty="0">
@@ -3227,24 +3225,7 @@
                 <a:latin typeface="微軟正黑體" pitchFamily="34" charset="-120"/>
                 <a:ea typeface="微軟正黑體" pitchFamily="34" charset="-120"/>
               </a:rPr>
-              <a:t>最</a:t>
-            </a:r>
-            <a:r>
-              <a:rPr lang="zh-TW" altLang="en-US" sz="7200" b="1" i="1" dirty="0">
-                <a:solidFill>
-                  <a:srgbClr val="660033"/>
-                </a:solidFill>
-                <a:effectLst>
-                  <a:outerShdw blurRad="38100" dist="38100" dir="2700000" algn="tl">
-                    <a:srgbClr val="000000">
-                      <a:alpha val="43137"/>
-                    </a:srgbClr>
-                  </a:outerShdw>
-                </a:effectLst>
-                <a:latin typeface="微軟正黑體" pitchFamily="34" charset="-120"/>
-                <a:ea typeface="微軟正黑體" pitchFamily="34" charset="-120"/>
-              </a:rPr>
-              <a:t>重要</a:t>
+              <a:t>最重要</a:t>
             </a:r>
           </a:p>
         </p:txBody>
@@ -3312,7 +3293,17 @@
                 <a:latin typeface="微軟正黑體" pitchFamily="34" charset="-120"/>
                 <a:ea typeface="微軟正黑體" pitchFamily="34" charset="-120"/>
               </a:rPr>
-              <a:t>於我這家也</a:t>
+              <a:t>於我這家也屬</a:t>
+            </a:r>
+            <a:r>
+              <a:rPr lang="zh-CN" altLang="en-US" sz="6400" b="1" dirty="0">
+                <a:solidFill>
+                  <a:srgbClr val="660033"/>
+                </a:solidFill>
+                <a:latin typeface="微軟正黑體" pitchFamily="34" charset="-120"/>
+                <a:ea typeface="微軟正黑體" pitchFamily="34" charset="-120"/>
+              </a:rPr>
+              <a:t>祢</a:t>
             </a:r>
             <a:r>
               <a:rPr lang="zh-TW" altLang="en-US" sz="6400" b="1" dirty="0">
@@ -3322,7 +3313,7 @@
                 <a:latin typeface="微軟正黑體" pitchFamily="34" charset="-120"/>
                 <a:ea typeface="微軟正黑體" pitchFamily="34" charset="-120"/>
               </a:rPr>
-              <a:t>屬</a:t>
+              <a:t>終生歸</a:t>
             </a:r>
             <a:r>
               <a:rPr lang="zh-CN" altLang="en-US" sz="6400" b="1" dirty="0">
@@ -3332,47 +3323,7 @@
                 <a:latin typeface="微軟正黑體" pitchFamily="34" charset="-120"/>
                 <a:ea typeface="微軟正黑體" pitchFamily="34" charset="-120"/>
               </a:rPr>
-              <a:t>袮</a:t>
-            </a:r>
-            <a:r>
-              <a:rPr lang="zh-TW" altLang="en-US" sz="6400" b="1" dirty="0">
-                <a:solidFill>
-                  <a:srgbClr val="660033"/>
-                </a:solidFill>
-                <a:latin typeface="微軟正黑體" pitchFamily="34" charset="-120"/>
-                <a:ea typeface="微軟正黑體" pitchFamily="34" charset="-120"/>
-              </a:rPr>
-              <a:t>終</a:t>
-            </a:r>
-            <a:r>
-              <a:rPr lang="zh-TW" altLang="en-US" sz="6400" b="1" dirty="0">
-                <a:solidFill>
-                  <a:srgbClr val="660033"/>
-                </a:solidFill>
-                <a:latin typeface="微軟正黑體" pitchFamily="34" charset="-120"/>
-                <a:ea typeface="微軟正黑體" pitchFamily="34" charset="-120"/>
-              </a:rPr>
-              <a:t>生</a:t>
-            </a:r>
-            <a:r>
-              <a:rPr lang="zh-TW" altLang="en-US" sz="6400" b="1" dirty="0">
-                <a:solidFill>
-                  <a:srgbClr val="660033"/>
-                </a:solidFill>
-                <a:latin typeface="微軟正黑體" pitchFamily="34" charset="-120"/>
-                <a:ea typeface="微軟正黑體" pitchFamily="34" charset="-120"/>
-              </a:rPr>
-              <a:t>歸</a:t>
-            </a:r>
-            <a:r>
-              <a:rPr lang="zh-CN" altLang="en-US" sz="6400" b="1" dirty="0">
-                <a:solidFill>
-                  <a:srgbClr val="660033"/>
-                </a:solidFill>
-                <a:latin typeface="微軟正黑體" pitchFamily="34" charset="-120"/>
-                <a:ea typeface="微軟正黑體" pitchFamily="34" charset="-120"/>
-              </a:rPr>
-              <a:t>袮</a:t>
+              <a:t>祢</a:t>
             </a:r>
             <a:endParaRPr lang="zh-TW" altLang="en-US" sz="6400" b="1" dirty="0">
               <a:solidFill>
@@ -3380,6 +3331,51 @@
               </a:solidFill>
               <a:latin typeface="微軟正黑體" pitchFamily="34" charset="-120"/>
               <a:ea typeface="微軟正黑體" pitchFamily="34" charset="-120"/>
+            </a:endParaRPr>
+          </a:p>
+        </p:txBody>
+      </p:sp>
+      <p:sp>
+        <p:nvSpPr>
+          <p:cNvPr id="2" name="TextBox 1">
+            <a:extLst>
+              <a:ext uri="{FF2B5EF4-FFF2-40B4-BE49-F238E27FC236}">
+                <a16:creationId xmlns:a16="http://schemas.microsoft.com/office/drawing/2014/main" id="{581B6C47-7D93-0A94-ECE4-6EA3FEC20E02}"/>
+              </a:ext>
+            </a:extLst>
+          </p:cNvPr>
+          <p:cNvSpPr txBox="1"/>
+          <p:nvPr/>
+        </p:nvSpPr>
+        <p:spPr>
+          <a:xfrm>
+            <a:off x="4108" y="5229200"/>
+            <a:ext cx="12187892" cy="646331"/>
+          </a:xfrm>
+          <a:prstGeom prst="rect">
+            <a:avLst/>
+          </a:prstGeom>
+          <a:noFill/>
+        </p:spPr>
+        <p:txBody>
+          <a:bodyPr wrap="square" rtlCol="0">
+            <a:spAutoFit/>
+          </a:bodyPr>
+          <a:lstStyle/>
+          <a:p>
+            <a:pPr algn="ctr"/>
+            <a:r>
+              <a:rPr lang="en-US" sz="3600" b="1" dirty="0">
+                <a:solidFill>
+                  <a:srgbClr val="660033"/>
+                </a:solidFill>
+              </a:rPr>
+              <a:t>( 2 / 2 )</a:t>
+            </a:r>
+            <a:endParaRPr lang="vi-VN" sz="3600" b="1" dirty="0">
+              <a:solidFill>
+                <a:srgbClr val="660033"/>
+              </a:solidFill>
             </a:endParaRPr>
           </a:p>
         </p:txBody>
@@ -3447,7 +3443,17 @@
                 <a:latin typeface="微軟正黑體" pitchFamily="34" charset="-120"/>
                 <a:ea typeface="微軟正黑體" pitchFamily="34" charset="-120"/>
               </a:rPr>
-              <a:t>頌讚  跪</a:t>
+              <a:t>頌讚  跪拜</a:t>
+            </a:r>
+            <a:r>
+              <a:rPr lang="en-US" altLang="zh-TW" sz="6400" b="1" dirty="0">
+                <a:solidFill>
+                  <a:srgbClr val="660033"/>
+                </a:solidFill>
+                <a:latin typeface="微軟正黑體" pitchFamily="34" charset="-120"/>
+                <a:ea typeface="微軟正黑體" pitchFamily="34" charset="-120"/>
+              </a:rPr>
+              <a:t>  </a:t>
             </a:r>
             <a:r>
               <a:rPr lang="zh-TW" altLang="en-US" sz="6400" b="1" dirty="0">
@@ -3457,37 +3463,7 @@
                 <a:latin typeface="微軟正黑體" pitchFamily="34" charset="-120"/>
                 <a:ea typeface="微軟正黑體" pitchFamily="34" charset="-120"/>
               </a:rPr>
-              <a:t>拜</a:t>
-            </a:r>
-            <a:r>
-              <a:rPr lang="en-US" altLang="zh-TW" sz="6400" b="1" dirty="0">
-                <a:solidFill>
-                  <a:srgbClr val="660033"/>
-                </a:solidFill>
-                <a:latin typeface="微軟正黑體" pitchFamily="34" charset="-120"/>
-                <a:ea typeface="微軟正黑體" pitchFamily="34" charset="-120"/>
-              </a:rPr>
-              <a:t>  </a:t>
-            </a:r>
-            <a:r>
-              <a:rPr lang="zh-TW" altLang="en-US" sz="6400" b="1" dirty="0">
-                <a:solidFill>
-                  <a:srgbClr val="660033"/>
-                </a:solidFill>
-                <a:latin typeface="微軟正黑體" pitchFamily="34" charset="-120"/>
-                <a:ea typeface="微軟正黑體" pitchFamily="34" charset="-120"/>
-              </a:rPr>
-              <a:t>頌</a:t>
-            </a:r>
-            <a:r>
-              <a:rPr lang="zh-TW" altLang="en-US" sz="6400" b="1" dirty="0">
-                <a:solidFill>
-                  <a:srgbClr val="660033"/>
-                </a:solidFill>
-                <a:latin typeface="微軟正黑體" pitchFamily="34" charset="-120"/>
-                <a:ea typeface="微軟正黑體" pitchFamily="34" charset="-120"/>
-              </a:rPr>
-              <a:t>讚永歸我主</a:t>
+              <a:t>頌讚永歸我主</a:t>
             </a:r>
             <a:endParaRPr lang="en-US" altLang="zh-TW" sz="6400" b="1" dirty="0">
               <a:solidFill>
@@ -3509,7 +3485,17 @@
                 <a:latin typeface="微軟正黑體" pitchFamily="34" charset="-120"/>
                 <a:ea typeface="微軟正黑體" pitchFamily="34" charset="-120"/>
               </a:rPr>
-              <a:t>頌讚  跪</a:t>
+              <a:t>頌讚  跪拜</a:t>
+            </a:r>
+            <a:r>
+              <a:rPr lang="en-US" altLang="zh-TW" sz="6400" b="1" dirty="0">
+                <a:solidFill>
+                  <a:srgbClr val="660033"/>
+                </a:solidFill>
+                <a:latin typeface="微軟正黑體" pitchFamily="34" charset="-120"/>
+                <a:ea typeface="微軟正黑體" pitchFamily="34" charset="-120"/>
+              </a:rPr>
+              <a:t>  </a:t>
             </a:r>
             <a:r>
               <a:rPr lang="zh-TW" altLang="en-US" sz="6400" b="1" dirty="0">
@@ -3519,38 +3505,53 @@
                 <a:latin typeface="微軟正黑體" pitchFamily="34" charset="-120"/>
                 <a:ea typeface="微軟正黑體" pitchFamily="34" charset="-120"/>
               </a:rPr>
-              <a:t>拜</a:t>
-            </a:r>
-            <a:r>
-              <a:rPr lang="en-US" altLang="zh-TW" sz="6400" b="1" dirty="0">
-                <a:solidFill>
-                  <a:srgbClr val="660033"/>
-                </a:solidFill>
-                <a:latin typeface="微軟正黑體" pitchFamily="34" charset="-120"/>
-                <a:ea typeface="微軟正黑體" pitchFamily="34" charset="-120"/>
-              </a:rPr>
-              <a:t>  </a:t>
-            </a:r>
-            <a:r>
-              <a:rPr lang="zh-TW" altLang="en-US" sz="6400" b="1" dirty="0">
-                <a:solidFill>
-                  <a:srgbClr val="660033"/>
-                </a:solidFill>
-                <a:latin typeface="微軟正黑體" pitchFamily="34" charset="-120"/>
-                <a:ea typeface="微軟正黑體" pitchFamily="34" charset="-120"/>
-              </a:rPr>
-              <a:t>讓</a:t>
-            </a:r>
-            <a:r>
-              <a:rPr lang="zh-TW" altLang="en-US" sz="6400" b="1" dirty="0">
-                <a:solidFill>
-                  <a:srgbClr val="660033"/>
-                </a:solidFill>
-                <a:latin typeface="微軟正黑體" pitchFamily="34" charset="-120"/>
-                <a:ea typeface="微軟正黑體" pitchFamily="34" charset="-120"/>
-              </a:rPr>
-              <a:t>我家歸我王</a:t>
-            </a:r>
+              <a:t>讓我家歸我王</a:t>
+            </a:r>
+          </a:p>
+        </p:txBody>
+      </p:sp>
+      <p:sp>
+        <p:nvSpPr>
+          <p:cNvPr id="2" name="TextBox 1">
+            <a:extLst>
+              <a:ext uri="{FF2B5EF4-FFF2-40B4-BE49-F238E27FC236}">
+                <a16:creationId xmlns:a16="http://schemas.microsoft.com/office/drawing/2014/main" id="{D1D8ABA7-057C-58D1-CB08-C587C6EBB580}"/>
+              </a:ext>
+            </a:extLst>
+          </p:cNvPr>
+          <p:cNvSpPr txBox="1"/>
+          <p:nvPr/>
+        </p:nvSpPr>
+        <p:spPr>
+          <a:xfrm>
+            <a:off x="4108" y="5229200"/>
+            <a:ext cx="12187892" cy="646331"/>
+          </a:xfrm>
+          <a:prstGeom prst="rect">
+            <a:avLst/>
+          </a:prstGeom>
+          <a:noFill/>
+        </p:spPr>
+        <p:txBody>
+          <a:bodyPr wrap="square" rtlCol="0">
+            <a:spAutoFit/>
+          </a:bodyPr>
+          <a:lstStyle/>
+          <a:p>
+            <a:pPr algn="ctr"/>
+            <a:r>
+              <a:rPr lang="en-US" sz="3600" b="1" dirty="0">
+                <a:solidFill>
+                  <a:srgbClr val="660033"/>
+                </a:solidFill>
+              </a:rPr>
+              <a:t>( 2 / 2 )</a:t>
+            </a:r>
+            <a:endParaRPr lang="vi-VN" sz="3600" b="1" dirty="0">
+              <a:solidFill>
+                <a:srgbClr val="660033"/>
+              </a:solidFill>
+            </a:endParaRPr>
           </a:p>
         </p:txBody>
       </p:sp>
@@ -3651,6 +3652,51 @@
           </a:p>
         </p:txBody>
       </p:sp>
+      <p:sp>
+        <p:nvSpPr>
+          <p:cNvPr id="2" name="TextBox 1">
+            <a:extLst>
+              <a:ext uri="{FF2B5EF4-FFF2-40B4-BE49-F238E27FC236}">
+                <a16:creationId xmlns:a16="http://schemas.microsoft.com/office/drawing/2014/main" id="{DF266DA0-6606-E727-ED2A-0367B070DA26}"/>
+              </a:ext>
+            </a:extLst>
+          </p:cNvPr>
+          <p:cNvSpPr txBox="1"/>
+          <p:nvPr/>
+        </p:nvSpPr>
+        <p:spPr>
+          <a:xfrm>
+            <a:off x="4108" y="5229200"/>
+            <a:ext cx="12187892" cy="646331"/>
+          </a:xfrm>
+          <a:prstGeom prst="rect">
+            <a:avLst/>
+          </a:prstGeom>
+          <a:noFill/>
+        </p:spPr>
+        <p:txBody>
+          <a:bodyPr wrap="square" rtlCol="0">
+            <a:spAutoFit/>
+          </a:bodyPr>
+          <a:lstStyle/>
+          <a:p>
+            <a:pPr algn="ctr"/>
+            <a:r>
+              <a:rPr lang="en-US" sz="3600" b="1" dirty="0">
+                <a:solidFill>
+                  <a:srgbClr val="660033"/>
+                </a:solidFill>
+              </a:rPr>
+              <a:t>( 2 / 2 )</a:t>
+            </a:r>
+            <a:endParaRPr lang="vi-VN" sz="3600" b="1" dirty="0">
+              <a:solidFill>
+                <a:srgbClr val="660033"/>
+              </a:solidFill>
+            </a:endParaRPr>
+          </a:p>
+        </p:txBody>
+      </p:sp>
     </p:spTree>
     <p:extLst>
       <p:ext uri="{BB962C8B-B14F-4D97-AF65-F5344CB8AC3E}">
@@ -3714,7 +3760,17 @@
                 <a:latin typeface="微軟正黑體" pitchFamily="34" charset="-120"/>
                 <a:ea typeface="微軟正黑體" pitchFamily="34" charset="-120"/>
               </a:rPr>
-              <a:t>榮耀都歸</a:t>
+              <a:t>榮耀都歸於</a:t>
+            </a:r>
+            <a:r>
+              <a:rPr lang="zh-CN" altLang="en-US" sz="6400" b="1" dirty="0">
+                <a:solidFill>
+                  <a:srgbClr val="660033"/>
+                </a:solidFill>
+                <a:latin typeface="微軟正黑體" pitchFamily="34" charset="-120"/>
+                <a:ea typeface="微軟正黑體" pitchFamily="34" charset="-120"/>
+              </a:rPr>
+              <a:t>祢</a:t>
             </a:r>
             <a:r>
               <a:rPr lang="zh-TW" altLang="en-US" sz="6400" b="1" dirty="0">
@@ -3724,7 +3780,7 @@
                 <a:latin typeface="微軟正黑體" pitchFamily="34" charset="-120"/>
                 <a:ea typeface="微軟正黑體" pitchFamily="34" charset="-120"/>
               </a:rPr>
-              <a:t>於</a:t>
+              <a:t>皆因</a:t>
             </a:r>
             <a:r>
               <a:rPr lang="zh-CN" altLang="en-US" sz="6400" b="1" dirty="0">
@@ -3734,7 +3790,7 @@
                 <a:latin typeface="微軟正黑體" pitchFamily="34" charset="-120"/>
                 <a:ea typeface="微軟正黑體" pitchFamily="34" charset="-120"/>
               </a:rPr>
-              <a:t>袮</a:t>
+              <a:t>祢</a:t>
             </a:r>
             <a:r>
               <a:rPr lang="zh-TW" altLang="en-US" sz="6400" b="1" dirty="0">
@@ -3744,37 +3800,7 @@
                 <a:latin typeface="微軟正黑體" pitchFamily="34" charset="-120"/>
                 <a:ea typeface="微軟正黑體" pitchFamily="34" charset="-120"/>
               </a:rPr>
-              <a:t>皆因</a:t>
-            </a:r>
-            <a:r>
-              <a:rPr lang="zh-CN" altLang="en-US" sz="6400" b="1" dirty="0">
-                <a:solidFill>
-                  <a:srgbClr val="660033"/>
-                </a:solidFill>
-                <a:latin typeface="微軟正黑體" pitchFamily="34" charset="-120"/>
-                <a:ea typeface="微軟正黑體" pitchFamily="34" charset="-120"/>
-              </a:rPr>
-              <a:t>袮</a:t>
-            </a:r>
-            <a:r>
-              <a:rPr lang="zh-TW" altLang="en-US" sz="6400" b="1" dirty="0">
-                <a:solidFill>
-                  <a:srgbClr val="660033"/>
-                </a:solidFill>
-                <a:latin typeface="微軟正黑體" pitchFamily="34" charset="-120"/>
-                <a:ea typeface="微軟正黑體" pitchFamily="34" charset="-120"/>
-              </a:rPr>
-              <a:t>是</a:t>
-            </a:r>
-            <a:r>
-              <a:rPr lang="zh-TW" altLang="en-US" sz="6400" b="1" dirty="0">
-                <a:solidFill>
-                  <a:srgbClr val="660033"/>
-                </a:solidFill>
-                <a:latin typeface="微軟正黑體" pitchFamily="34" charset="-120"/>
-                <a:ea typeface="微軟正黑體" pitchFamily="34" charset="-120"/>
-              </a:rPr>
-              <a:t>愛</a:t>
+              <a:t>是愛</a:t>
             </a:r>
             <a:endParaRPr lang="en-US" altLang="zh-TW" sz="6400" b="1" dirty="0">
               <a:solidFill>
@@ -3798,6 +3824,51 @@
               </a:rPr>
               <a:t>神是我一家中最深刻最重要</a:t>
             </a:r>
+          </a:p>
+        </p:txBody>
+      </p:sp>
+      <p:sp>
+        <p:nvSpPr>
+          <p:cNvPr id="2" name="TextBox 1">
+            <a:extLst>
+              <a:ext uri="{FF2B5EF4-FFF2-40B4-BE49-F238E27FC236}">
+                <a16:creationId xmlns:a16="http://schemas.microsoft.com/office/drawing/2014/main" id="{5668E949-E886-6216-2DA1-9FCA49E8EC08}"/>
+              </a:ext>
+            </a:extLst>
+          </p:cNvPr>
+          <p:cNvSpPr txBox="1"/>
+          <p:nvPr/>
+        </p:nvSpPr>
+        <p:spPr>
+          <a:xfrm>
+            <a:off x="4108" y="5229200"/>
+            <a:ext cx="12187892" cy="646331"/>
+          </a:xfrm>
+          <a:prstGeom prst="rect">
+            <a:avLst/>
+          </a:prstGeom>
+          <a:noFill/>
+        </p:spPr>
+        <p:txBody>
+          <a:bodyPr wrap="square" rtlCol="0">
+            <a:spAutoFit/>
+          </a:bodyPr>
+          <a:lstStyle/>
+          <a:p>
+            <a:pPr algn="ctr"/>
+            <a:r>
+              <a:rPr lang="en-US" sz="3600" b="1" dirty="0">
+                <a:solidFill>
+                  <a:srgbClr val="660033"/>
+                </a:solidFill>
+              </a:rPr>
+              <a:t>( 2 / 2 )</a:t>
+            </a:r>
+            <a:endParaRPr lang="vi-VN" sz="3600" b="1" dirty="0">
+              <a:solidFill>
+                <a:srgbClr val="660033"/>
+              </a:solidFill>
+            </a:endParaRPr>
           </a:p>
         </p:txBody>
       </p:sp>
@@ -3874,7 +3945,7 @@
                 <a:latin typeface="微軟正黑體" pitchFamily="34" charset="-120"/>
                 <a:ea typeface="微軟正黑體" pitchFamily="34" charset="-120"/>
               </a:rPr>
-              <a:t>袮</a:t>
+              <a:t>祢</a:t>
             </a:r>
             <a:r>
               <a:rPr lang="zh-TW" altLang="en-US" sz="6400" b="1" dirty="0">
@@ -3906,7 +3977,17 @@
                 <a:latin typeface="微軟正黑體" pitchFamily="34" charset="-120"/>
                 <a:ea typeface="微軟正黑體" pitchFamily="34" charset="-120"/>
               </a:rPr>
-              <a:t>在</a:t>
+              <a:t>在我的心中最重要</a:t>
+            </a:r>
+            <a:r>
+              <a:rPr lang="en-US" altLang="zh-TW" sz="6400" b="1" dirty="0">
+                <a:solidFill>
+                  <a:srgbClr val="660033"/>
+                </a:solidFill>
+                <a:latin typeface="微軟正黑體" pitchFamily="34" charset="-120"/>
+                <a:ea typeface="微軟正黑體" pitchFamily="34" charset="-120"/>
+              </a:rPr>
+              <a:t>  </a:t>
             </a:r>
             <a:r>
               <a:rPr lang="zh-TW" altLang="en-US" sz="6400" b="1" dirty="0">
@@ -3916,57 +3997,7 @@
                 <a:latin typeface="微軟正黑體" pitchFamily="34" charset="-120"/>
                 <a:ea typeface="微軟正黑體" pitchFamily="34" charset="-120"/>
               </a:rPr>
-              <a:t>我的心中最重</a:t>
-            </a:r>
-            <a:r>
-              <a:rPr lang="zh-TW" altLang="en-US" sz="6400" b="1" dirty="0">
-                <a:solidFill>
-                  <a:srgbClr val="660033"/>
-                </a:solidFill>
-                <a:latin typeface="微軟正黑體" pitchFamily="34" charset="-120"/>
-                <a:ea typeface="微軟正黑體" pitchFamily="34" charset="-120"/>
-              </a:rPr>
-              <a:t>要</a:t>
-            </a:r>
-            <a:r>
-              <a:rPr lang="en-US" altLang="zh-TW" sz="6400" b="1" dirty="0">
-                <a:solidFill>
-                  <a:srgbClr val="660033"/>
-                </a:solidFill>
-                <a:latin typeface="微軟正黑體" pitchFamily="34" charset="-120"/>
-                <a:ea typeface="微軟正黑體" pitchFamily="34" charset="-120"/>
-              </a:rPr>
-              <a:t>  </a:t>
-            </a:r>
-            <a:r>
-              <a:rPr lang="zh-TW" altLang="en-US" sz="6400" b="1" dirty="0">
-                <a:solidFill>
-                  <a:srgbClr val="660033"/>
-                </a:solidFill>
-                <a:latin typeface="微軟正黑體" pitchFamily="34" charset="-120"/>
-                <a:ea typeface="微軟正黑體" pitchFamily="34" charset="-120"/>
-              </a:rPr>
-              <a:t>重</a:t>
-            </a:r>
-            <a:r>
-              <a:rPr lang="zh-TW" altLang="en-US" sz="6400" b="1" dirty="0">
-                <a:solidFill>
-                  <a:srgbClr val="660033"/>
-                </a:solidFill>
-                <a:latin typeface="微軟正黑體" pitchFamily="34" charset="-120"/>
-                <a:ea typeface="微軟正黑體" pitchFamily="34" charset="-120"/>
-              </a:rPr>
-              <a:t>要</a:t>
-            </a:r>
-            <a:r>
-              <a:rPr lang="zh-TW" altLang="en-US" sz="6400" b="1" dirty="0">
-                <a:solidFill>
-                  <a:srgbClr val="660033"/>
-                </a:solidFill>
-                <a:latin typeface="微軟正黑體" pitchFamily="34" charset="-120"/>
-                <a:ea typeface="微軟正黑體" pitchFamily="34" charset="-120"/>
-              </a:rPr>
-              <a:t>是</a:t>
+              <a:t>重要是</a:t>
             </a:r>
             <a:r>
               <a:rPr lang="zh-CN" altLang="en-US" sz="6400" b="1" dirty="0">
@@ -3976,7 +4007,7 @@
                 <a:latin typeface="微軟正黑體" pitchFamily="34" charset="-120"/>
                 <a:ea typeface="微軟正黑體" pitchFamily="34" charset="-120"/>
               </a:rPr>
-              <a:t>袮</a:t>
+              <a:t>祢</a:t>
             </a:r>
             <a:endParaRPr lang="en-US" altLang="zh-TW" sz="6400" b="1" dirty="0">
               <a:solidFill>
@@ -3984,6 +4015,51 @@
               </a:solidFill>
               <a:latin typeface="微軟正黑體" pitchFamily="34" charset="-120"/>
               <a:ea typeface="微軟正黑體" pitchFamily="34" charset="-120"/>
+            </a:endParaRPr>
+          </a:p>
+        </p:txBody>
+      </p:sp>
+      <p:sp>
+        <p:nvSpPr>
+          <p:cNvPr id="2" name="TextBox 1">
+            <a:extLst>
+              <a:ext uri="{FF2B5EF4-FFF2-40B4-BE49-F238E27FC236}">
+                <a16:creationId xmlns:a16="http://schemas.microsoft.com/office/drawing/2014/main" id="{BBDF69DA-CE58-0E77-9665-BE4896337994}"/>
+              </a:ext>
+            </a:extLst>
+          </p:cNvPr>
+          <p:cNvSpPr txBox="1"/>
+          <p:nvPr/>
+        </p:nvSpPr>
+        <p:spPr>
+          <a:xfrm>
+            <a:off x="4108" y="5229200"/>
+            <a:ext cx="12187892" cy="646331"/>
+          </a:xfrm>
+          <a:prstGeom prst="rect">
+            <a:avLst/>
+          </a:prstGeom>
+          <a:noFill/>
+        </p:spPr>
+        <p:txBody>
+          <a:bodyPr wrap="square" rtlCol="0">
+            <a:spAutoFit/>
+          </a:bodyPr>
+          <a:lstStyle/>
+          <a:p>
+            <a:pPr algn="ctr"/>
+            <a:r>
+              <a:rPr lang="en-US" sz="3600" b="1" dirty="0">
+                <a:solidFill>
+                  <a:srgbClr val="660033"/>
+                </a:solidFill>
+              </a:rPr>
+              <a:t>( 1 / 2 )</a:t>
+            </a:r>
+            <a:endParaRPr lang="vi-VN" sz="3600" b="1" dirty="0">
+              <a:solidFill>
+                <a:srgbClr val="660033"/>
+              </a:solidFill>
             </a:endParaRPr>
           </a:p>
         </p:txBody>
@@ -4051,7 +4127,17 @@
                 <a:latin typeface="微軟正黑體" pitchFamily="34" charset="-120"/>
                 <a:ea typeface="微軟正黑體" pitchFamily="34" charset="-120"/>
               </a:rPr>
-              <a:t>全地其上全</a:t>
+              <a:t>全地其上全賴</a:t>
+            </a:r>
+            <a:r>
+              <a:rPr lang="zh-CN" altLang="en-US" sz="6400" b="1" dirty="0">
+                <a:solidFill>
+                  <a:srgbClr val="660033"/>
+                </a:solidFill>
+                <a:latin typeface="微軟正黑體" pitchFamily="34" charset="-120"/>
+                <a:ea typeface="微軟正黑體" pitchFamily="34" charset="-120"/>
+              </a:rPr>
+              <a:t>祢</a:t>
             </a:r>
             <a:r>
               <a:rPr lang="zh-TW" altLang="en-US" sz="6400" b="1" dirty="0">
@@ -4061,37 +4147,7 @@
                 <a:latin typeface="微軟正黑體" pitchFamily="34" charset="-120"/>
                 <a:ea typeface="微軟正黑體" pitchFamily="34" charset="-120"/>
               </a:rPr>
-              <a:t>賴</a:t>
-            </a:r>
-            <a:r>
-              <a:rPr lang="zh-CN" altLang="en-US" sz="6400" b="1" dirty="0">
-                <a:solidFill>
-                  <a:srgbClr val="660033"/>
-                </a:solidFill>
-                <a:latin typeface="微軟正黑體" pitchFamily="34" charset="-120"/>
-                <a:ea typeface="微軟正黑體" pitchFamily="34" charset="-120"/>
-              </a:rPr>
-              <a:t>袮</a:t>
-            </a:r>
-            <a:r>
-              <a:rPr lang="zh-TW" altLang="en-US" sz="6400" b="1" dirty="0">
-                <a:solidFill>
-                  <a:srgbClr val="660033"/>
-                </a:solidFill>
-                <a:latin typeface="微軟正黑體" pitchFamily="34" charset="-120"/>
-                <a:ea typeface="微軟正黑體" pitchFamily="34" charset="-120"/>
-              </a:rPr>
-              <a:t>一</a:t>
-            </a:r>
-            <a:r>
-              <a:rPr lang="zh-TW" altLang="en-US" sz="6400" b="1" dirty="0">
-                <a:solidFill>
-                  <a:srgbClr val="660033"/>
-                </a:solidFill>
-                <a:latin typeface="微軟正黑體" pitchFamily="34" charset="-120"/>
-                <a:ea typeface="微軟正黑體" pitchFamily="34" charset="-120"/>
-              </a:rPr>
-              <a:t>一創造</a:t>
+              <a:t>一一創造</a:t>
             </a:r>
             <a:endParaRPr lang="en-US" altLang="zh-TW" sz="6400" b="1" dirty="0">
               <a:solidFill>
@@ -4123,7 +4179,7 @@
                 <a:latin typeface="微軟正黑體" pitchFamily="34" charset="-120"/>
                 <a:ea typeface="微軟正黑體" pitchFamily="34" charset="-120"/>
               </a:rPr>
-              <a:t>袮</a:t>
+              <a:t>祢</a:t>
             </a:r>
             <a:r>
               <a:rPr lang="zh-TW" altLang="en-US" sz="6400" b="1" dirty="0">
@@ -4133,17 +4189,7 @@
                 <a:latin typeface="微軟正黑體" pitchFamily="34" charset="-120"/>
                 <a:ea typeface="微軟正黑體" pitchFamily="34" charset="-120"/>
               </a:rPr>
-              <a:t>親</a:t>
-            </a:r>
-            <a:r>
-              <a:rPr lang="zh-TW" altLang="en-US" sz="6400" b="1" dirty="0">
-                <a:solidFill>
-                  <a:srgbClr val="660033"/>
-                </a:solidFill>
-                <a:latin typeface="微軟正黑體" pitchFamily="34" charset="-120"/>
-                <a:ea typeface="微軟正黑體" pitchFamily="34" charset="-120"/>
-              </a:rPr>
-              <a:t>手鋪設宇宙繁星</a:t>
+              <a:t>親手鋪設宇宙繁星</a:t>
             </a:r>
             <a:endParaRPr lang="en-US" altLang="zh-TW" sz="6400" b="1" dirty="0">
               <a:solidFill>
@@ -4151,6 +4197,51 @@
               </a:solidFill>
               <a:latin typeface="微軟正黑體" pitchFamily="34" charset="-120"/>
               <a:ea typeface="微軟正黑體" pitchFamily="34" charset="-120"/>
+            </a:endParaRPr>
+          </a:p>
+        </p:txBody>
+      </p:sp>
+      <p:sp>
+        <p:nvSpPr>
+          <p:cNvPr id="2" name="TextBox 1">
+            <a:extLst>
+              <a:ext uri="{FF2B5EF4-FFF2-40B4-BE49-F238E27FC236}">
+                <a16:creationId xmlns:a16="http://schemas.microsoft.com/office/drawing/2014/main" id="{F4E9EDE7-FC66-19D3-886F-D4241A07F5E7}"/>
+              </a:ext>
+            </a:extLst>
+          </p:cNvPr>
+          <p:cNvSpPr txBox="1"/>
+          <p:nvPr/>
+        </p:nvSpPr>
+        <p:spPr>
+          <a:xfrm>
+            <a:off x="4108" y="5229200"/>
+            <a:ext cx="12187892" cy="646331"/>
+          </a:xfrm>
+          <a:prstGeom prst="rect">
+            <a:avLst/>
+          </a:prstGeom>
+          <a:noFill/>
+        </p:spPr>
+        <p:txBody>
+          <a:bodyPr wrap="square" rtlCol="0">
+            <a:spAutoFit/>
+          </a:bodyPr>
+          <a:lstStyle/>
+          <a:p>
+            <a:pPr algn="ctr"/>
+            <a:r>
+              <a:rPr lang="en-US" sz="3600" b="1" dirty="0">
+                <a:solidFill>
+                  <a:srgbClr val="660033"/>
+                </a:solidFill>
+              </a:rPr>
+              <a:t>( 1 / 2 )</a:t>
+            </a:r>
+            <a:endParaRPr lang="vi-VN" sz="3600" b="1" dirty="0">
+              <a:solidFill>
+                <a:srgbClr val="660033"/>
+              </a:solidFill>
             </a:endParaRPr>
           </a:p>
         </p:txBody>
@@ -4218,7 +4309,17 @@
                 <a:latin typeface="微軟正黑體" pitchFamily="34" charset="-120"/>
                 <a:ea typeface="微軟正黑體" pitchFamily="34" charset="-120"/>
               </a:rPr>
-              <a:t>於</a:t>
+              <a:t>於我</a:t>
+            </a:r>
+            <a:r>
+              <a:rPr lang="zh-CN" altLang="en-US" sz="6400" b="1" dirty="0">
+                <a:solidFill>
+                  <a:srgbClr val="660033"/>
+                </a:solidFill>
+                <a:latin typeface="微軟正黑體" pitchFamily="34" charset="-120"/>
+                <a:ea typeface="微軟正黑體" pitchFamily="34" charset="-120"/>
+              </a:rPr>
+              <a:t>祢</a:t>
             </a:r>
             <a:r>
               <a:rPr lang="zh-TW" altLang="en-US" sz="6400" b="1" dirty="0">
@@ -4228,38 +4329,53 @@
                 <a:latin typeface="微軟正黑體" pitchFamily="34" charset="-120"/>
                 <a:ea typeface="微軟正黑體" pitchFamily="34" charset="-120"/>
               </a:rPr>
-              <a:t>我</a:t>
-            </a:r>
-            <a:r>
-              <a:rPr lang="zh-CN" altLang="en-US" sz="6400" b="1" dirty="0">
-                <a:solidFill>
-                  <a:srgbClr val="660033"/>
-                </a:solidFill>
-                <a:latin typeface="微軟正黑體" pitchFamily="34" charset="-120"/>
-                <a:ea typeface="微軟正黑體" pitchFamily="34" charset="-120"/>
-              </a:rPr>
-              <a:t>袮</a:t>
-            </a:r>
-            <a:r>
-              <a:rPr lang="zh-TW" altLang="en-US" sz="6400" b="1" dirty="0">
-                <a:solidFill>
-                  <a:srgbClr val="660033"/>
-                </a:solidFill>
-                <a:latin typeface="微軟正黑體" pitchFamily="34" charset="-120"/>
-                <a:ea typeface="微軟正黑體" pitchFamily="34" charset="-120"/>
-              </a:rPr>
-              <a:t>給</a:t>
-            </a:r>
-            <a:r>
-              <a:rPr lang="zh-TW" altLang="en-US" sz="6400" b="1" dirty="0">
-                <a:solidFill>
-                  <a:srgbClr val="660033"/>
-                </a:solidFill>
-                <a:latin typeface="微軟正黑體" pitchFamily="34" charset="-120"/>
-                <a:ea typeface="微軟正黑體" pitchFamily="34" charset="-120"/>
-              </a:rPr>
-              <a:t>我是到底的拯救</a:t>
-            </a:r>
+              <a:t>給我是到底的拯救</a:t>
+            </a:r>
+          </a:p>
+        </p:txBody>
+      </p:sp>
+      <p:sp>
+        <p:nvSpPr>
+          <p:cNvPr id="2" name="TextBox 1">
+            <a:extLst>
+              <a:ext uri="{FF2B5EF4-FFF2-40B4-BE49-F238E27FC236}">
+                <a16:creationId xmlns:a16="http://schemas.microsoft.com/office/drawing/2014/main" id="{4EBCC8E0-3D8A-4197-8453-A44E3719E5BF}"/>
+              </a:ext>
+            </a:extLst>
+          </p:cNvPr>
+          <p:cNvSpPr txBox="1"/>
+          <p:nvPr/>
+        </p:nvSpPr>
+        <p:spPr>
+          <a:xfrm>
+            <a:off x="4108" y="5229200"/>
+            <a:ext cx="12187892" cy="646331"/>
+          </a:xfrm>
+          <a:prstGeom prst="rect">
+            <a:avLst/>
+          </a:prstGeom>
+          <a:noFill/>
+        </p:spPr>
+        <p:txBody>
+          <a:bodyPr wrap="square" rtlCol="0">
+            <a:spAutoFit/>
+          </a:bodyPr>
+          <a:lstStyle/>
+          <a:p>
+            <a:pPr algn="ctr"/>
+            <a:r>
+              <a:rPr lang="en-US" sz="3600" b="1" dirty="0">
+                <a:solidFill>
+                  <a:srgbClr val="660033"/>
+                </a:solidFill>
+              </a:rPr>
+              <a:t>( 1 / 2 )</a:t>
+            </a:r>
+            <a:endParaRPr lang="vi-VN" sz="3600" b="1" dirty="0">
+              <a:solidFill>
+                <a:srgbClr val="660033"/>
+              </a:solidFill>
+            </a:endParaRPr>
           </a:p>
         </p:txBody>
       </p:sp>
@@ -4326,7 +4442,17 @@
                 <a:latin typeface="微軟正黑體" pitchFamily="34" charset="-120"/>
                 <a:ea typeface="微軟正黑體" pitchFamily="34" charset="-120"/>
               </a:rPr>
-              <a:t>頌讚  跪</a:t>
+              <a:t>頌讚  跪拜</a:t>
+            </a:r>
+            <a:r>
+              <a:rPr lang="en-US" altLang="zh-TW" sz="6400" b="1" dirty="0">
+                <a:solidFill>
+                  <a:srgbClr val="660033"/>
+                </a:solidFill>
+                <a:latin typeface="微軟正黑體" pitchFamily="34" charset="-120"/>
+                <a:ea typeface="微軟正黑體" pitchFamily="34" charset="-120"/>
+              </a:rPr>
+              <a:t>  </a:t>
             </a:r>
             <a:r>
               <a:rPr lang="zh-TW" altLang="en-US" sz="6400" b="1" dirty="0">
@@ -4336,37 +4462,7 @@
                 <a:latin typeface="微軟正黑體" pitchFamily="34" charset="-120"/>
                 <a:ea typeface="微軟正黑體" pitchFamily="34" charset="-120"/>
               </a:rPr>
-              <a:t>拜</a:t>
-            </a:r>
-            <a:r>
-              <a:rPr lang="en-US" altLang="zh-TW" sz="6400" b="1" dirty="0">
-                <a:solidFill>
-                  <a:srgbClr val="660033"/>
-                </a:solidFill>
-                <a:latin typeface="微軟正黑體" pitchFamily="34" charset="-120"/>
-                <a:ea typeface="微軟正黑體" pitchFamily="34" charset="-120"/>
-              </a:rPr>
-              <a:t>  </a:t>
-            </a:r>
-            <a:r>
-              <a:rPr lang="zh-TW" altLang="en-US" sz="6400" b="1" dirty="0">
-                <a:solidFill>
-                  <a:srgbClr val="660033"/>
-                </a:solidFill>
-                <a:latin typeface="微軟正黑體" pitchFamily="34" charset="-120"/>
-                <a:ea typeface="微軟正黑體" pitchFamily="34" charset="-120"/>
-              </a:rPr>
-              <a:t>頌</a:t>
-            </a:r>
-            <a:r>
-              <a:rPr lang="zh-TW" altLang="en-US" sz="6400" b="1" dirty="0">
-                <a:solidFill>
-                  <a:srgbClr val="660033"/>
-                </a:solidFill>
-                <a:latin typeface="微軟正黑體" pitchFamily="34" charset="-120"/>
-                <a:ea typeface="微軟正黑體" pitchFamily="34" charset="-120"/>
-              </a:rPr>
-              <a:t>讚永歸我主</a:t>
+              <a:t>頌讚永歸我主</a:t>
             </a:r>
             <a:endParaRPr lang="en-US" altLang="zh-TW" sz="6400" b="1" dirty="0">
               <a:solidFill>
@@ -4388,7 +4484,17 @@
                 <a:latin typeface="微軟正黑體" pitchFamily="34" charset="-120"/>
                 <a:ea typeface="微軟正黑體" pitchFamily="34" charset="-120"/>
               </a:rPr>
-              <a:t>頌讚  跪</a:t>
+              <a:t>頌讚  跪拜</a:t>
+            </a:r>
+            <a:r>
+              <a:rPr lang="en-US" altLang="zh-TW" sz="6400" b="1" dirty="0">
+                <a:solidFill>
+                  <a:srgbClr val="660033"/>
+                </a:solidFill>
+                <a:latin typeface="微軟正黑體" pitchFamily="34" charset="-120"/>
+                <a:ea typeface="微軟正黑體" pitchFamily="34" charset="-120"/>
+              </a:rPr>
+              <a:t>  </a:t>
             </a:r>
             <a:r>
               <a:rPr lang="zh-TW" altLang="en-US" sz="6400" b="1" dirty="0">
@@ -4398,38 +4504,53 @@
                 <a:latin typeface="微軟正黑體" pitchFamily="34" charset="-120"/>
                 <a:ea typeface="微軟正黑體" pitchFamily="34" charset="-120"/>
               </a:rPr>
-              <a:t>拜</a:t>
-            </a:r>
-            <a:r>
-              <a:rPr lang="en-US" altLang="zh-TW" sz="6400" b="1" dirty="0">
-                <a:solidFill>
-                  <a:srgbClr val="660033"/>
-                </a:solidFill>
-                <a:latin typeface="微軟正黑體" pitchFamily="34" charset="-120"/>
-                <a:ea typeface="微軟正黑體" pitchFamily="34" charset="-120"/>
-              </a:rPr>
-              <a:t>  </a:t>
-            </a:r>
-            <a:r>
-              <a:rPr lang="zh-TW" altLang="en-US" sz="6400" b="1" dirty="0">
-                <a:solidFill>
-                  <a:srgbClr val="660033"/>
-                </a:solidFill>
-                <a:latin typeface="微軟正黑體" pitchFamily="34" charset="-120"/>
-                <a:ea typeface="微軟正黑體" pitchFamily="34" charset="-120"/>
-              </a:rPr>
-              <a:t>讓</a:t>
-            </a:r>
-            <a:r>
-              <a:rPr lang="zh-TW" altLang="en-US" sz="6400" b="1" dirty="0">
-                <a:solidFill>
-                  <a:srgbClr val="660033"/>
-                </a:solidFill>
-                <a:latin typeface="微軟正黑體" pitchFamily="34" charset="-120"/>
-                <a:ea typeface="微軟正黑體" pitchFamily="34" charset="-120"/>
-              </a:rPr>
-              <a:t>我心歸我王</a:t>
-            </a:r>
+              <a:t>讓我心歸我王</a:t>
+            </a:r>
+          </a:p>
+        </p:txBody>
+      </p:sp>
+      <p:sp>
+        <p:nvSpPr>
+          <p:cNvPr id="2" name="TextBox 1">
+            <a:extLst>
+              <a:ext uri="{FF2B5EF4-FFF2-40B4-BE49-F238E27FC236}">
+                <a16:creationId xmlns:a16="http://schemas.microsoft.com/office/drawing/2014/main" id="{1D214588-CA37-3A7F-145D-6A3E906FB487}"/>
+              </a:ext>
+            </a:extLst>
+          </p:cNvPr>
+          <p:cNvSpPr txBox="1"/>
+          <p:nvPr/>
+        </p:nvSpPr>
+        <p:spPr>
+          <a:xfrm>
+            <a:off x="4108" y="5229200"/>
+            <a:ext cx="12187892" cy="646331"/>
+          </a:xfrm>
+          <a:prstGeom prst="rect">
+            <a:avLst/>
+          </a:prstGeom>
+          <a:noFill/>
+        </p:spPr>
+        <p:txBody>
+          <a:bodyPr wrap="square" rtlCol="0">
+            <a:spAutoFit/>
+          </a:bodyPr>
+          <a:lstStyle/>
+          <a:p>
+            <a:pPr algn="ctr"/>
+            <a:r>
+              <a:rPr lang="en-US" sz="3600" b="1" dirty="0">
+                <a:solidFill>
+                  <a:srgbClr val="660033"/>
+                </a:solidFill>
+              </a:rPr>
+              <a:t>( 1 / 2 )</a:t>
+            </a:r>
+            <a:endParaRPr lang="vi-VN" sz="3600" b="1" dirty="0">
+              <a:solidFill>
+                <a:srgbClr val="660033"/>
+              </a:solidFill>
+            </a:endParaRPr>
           </a:p>
         </p:txBody>
       </p:sp>
@@ -4496,17 +4617,7 @@
                 <a:latin typeface="微軟正黑體" pitchFamily="34" charset="-120"/>
                 <a:ea typeface="微軟正黑體" pitchFamily="34" charset="-120"/>
               </a:rPr>
-              <a:t>於天地裡再找不到</a:t>
-            </a:r>
-            <a:r>
-              <a:rPr lang="zh-TW" altLang="en-US" sz="6400" b="1" dirty="0">
-                <a:solidFill>
-                  <a:srgbClr val="660033"/>
-                </a:solidFill>
-                <a:latin typeface="微軟正黑體" pitchFamily="34" charset="-120"/>
-                <a:ea typeface="微軟正黑體" pitchFamily="34" charset="-120"/>
-              </a:rPr>
-              <a:t>比</a:t>
+              <a:t>於天地裡再找不到比</a:t>
             </a:r>
             <a:r>
               <a:rPr lang="zh-CN" altLang="en-US" sz="6400" b="1" dirty="0">
@@ -4516,7 +4627,7 @@
                 <a:latin typeface="微軟正黑體" pitchFamily="34" charset="-120"/>
                 <a:ea typeface="微軟正黑體" pitchFamily="34" charset="-120"/>
               </a:rPr>
-              <a:t>袮</a:t>
+              <a:t>祢</a:t>
             </a:r>
             <a:r>
               <a:rPr lang="zh-TW" altLang="en-US" sz="6400" b="1" dirty="0">
@@ -4556,6 +4667,51 @@
               </a:solidFill>
               <a:latin typeface="微軟正黑體" pitchFamily="34" charset="-120"/>
               <a:ea typeface="微軟正黑體" pitchFamily="34" charset="-120"/>
+            </a:endParaRPr>
+          </a:p>
+        </p:txBody>
+      </p:sp>
+      <p:sp>
+        <p:nvSpPr>
+          <p:cNvPr id="2" name="TextBox 1">
+            <a:extLst>
+              <a:ext uri="{FF2B5EF4-FFF2-40B4-BE49-F238E27FC236}">
+                <a16:creationId xmlns:a16="http://schemas.microsoft.com/office/drawing/2014/main" id="{5228AF1F-826B-5227-610D-6F955072670D}"/>
+              </a:ext>
+            </a:extLst>
+          </p:cNvPr>
+          <p:cNvSpPr txBox="1"/>
+          <p:nvPr/>
+        </p:nvSpPr>
+        <p:spPr>
+          <a:xfrm>
+            <a:off x="4108" y="5229200"/>
+            <a:ext cx="12187892" cy="646331"/>
+          </a:xfrm>
+          <a:prstGeom prst="rect">
+            <a:avLst/>
+          </a:prstGeom>
+          <a:noFill/>
+        </p:spPr>
+        <p:txBody>
+          <a:bodyPr wrap="square" rtlCol="0">
+            <a:spAutoFit/>
+          </a:bodyPr>
+          <a:lstStyle/>
+          <a:p>
+            <a:pPr algn="ctr"/>
+            <a:r>
+              <a:rPr lang="en-US" sz="3600" b="1" dirty="0">
+                <a:solidFill>
+                  <a:srgbClr val="660033"/>
+                </a:solidFill>
+              </a:rPr>
+              <a:t>( 1 / 2 )</a:t>
+            </a:r>
+            <a:endParaRPr lang="vi-VN" sz="3600" b="1" dirty="0">
+              <a:solidFill>
+                <a:srgbClr val="660033"/>
+              </a:solidFill>
             </a:endParaRPr>
           </a:p>
         </p:txBody>
@@ -4650,6 +4806,51 @@
           </a:p>
         </p:txBody>
       </p:sp>
+      <p:sp>
+        <p:nvSpPr>
+          <p:cNvPr id="2" name="TextBox 1">
+            <a:extLst>
+              <a:ext uri="{FF2B5EF4-FFF2-40B4-BE49-F238E27FC236}">
+                <a16:creationId xmlns:a16="http://schemas.microsoft.com/office/drawing/2014/main" id="{CBBE0726-0963-CE8F-9493-3AB5B73FE65B}"/>
+              </a:ext>
+            </a:extLst>
+          </p:cNvPr>
+          <p:cNvSpPr txBox="1"/>
+          <p:nvPr/>
+        </p:nvSpPr>
+        <p:spPr>
+          <a:xfrm>
+            <a:off x="4108" y="5229200"/>
+            <a:ext cx="12187892" cy="646331"/>
+          </a:xfrm>
+          <a:prstGeom prst="rect">
+            <a:avLst/>
+          </a:prstGeom>
+          <a:noFill/>
+        </p:spPr>
+        <p:txBody>
+          <a:bodyPr wrap="square" rtlCol="0">
+            <a:spAutoFit/>
+          </a:bodyPr>
+          <a:lstStyle/>
+          <a:p>
+            <a:pPr algn="ctr"/>
+            <a:r>
+              <a:rPr lang="en-US" sz="3600" b="1" dirty="0">
+                <a:solidFill>
+                  <a:srgbClr val="660033"/>
+                </a:solidFill>
+              </a:rPr>
+              <a:t>( 1 / 2 )</a:t>
+            </a:r>
+            <a:endParaRPr lang="vi-VN" sz="3600" b="1" dirty="0">
+              <a:solidFill>
+                <a:srgbClr val="660033"/>
+              </a:solidFill>
+            </a:endParaRPr>
+          </a:p>
+        </p:txBody>
+      </p:sp>
     </p:spTree>
     <p:extLst>
       <p:ext uri="{BB962C8B-B14F-4D97-AF65-F5344CB8AC3E}">
@@ -4723,7 +4924,7 @@
                 <a:latin typeface="微軟正黑體" pitchFamily="34" charset="-120"/>
                 <a:ea typeface="微軟正黑體" pitchFamily="34" charset="-120"/>
               </a:rPr>
-              <a:t>袮</a:t>
+              <a:t>祢</a:t>
             </a:r>
             <a:r>
               <a:rPr lang="zh-TW" altLang="en-US" sz="6400" b="1" dirty="0">
@@ -4755,7 +4956,17 @@
                 <a:latin typeface="微軟正黑體" pitchFamily="34" charset="-120"/>
                 <a:ea typeface="微軟正黑體" pitchFamily="34" charset="-120"/>
               </a:rPr>
-              <a:t>在</a:t>
+              <a:t>在我的一家最重要</a:t>
+            </a:r>
+            <a:r>
+              <a:rPr lang="en-US" altLang="zh-TW" sz="6400" b="1" dirty="0">
+                <a:solidFill>
+                  <a:srgbClr val="660033"/>
+                </a:solidFill>
+                <a:latin typeface="微軟正黑體" pitchFamily="34" charset="-120"/>
+                <a:ea typeface="微軟正黑體" pitchFamily="34" charset="-120"/>
+              </a:rPr>
+              <a:t>  </a:t>
             </a:r>
             <a:r>
               <a:rPr lang="zh-TW" altLang="en-US" sz="6400" b="1" dirty="0">
@@ -4765,57 +4976,7 @@
                 <a:latin typeface="微軟正黑體" pitchFamily="34" charset="-120"/>
                 <a:ea typeface="微軟正黑體" pitchFamily="34" charset="-120"/>
               </a:rPr>
-              <a:t>我的一家最重</a:t>
-            </a:r>
-            <a:r>
-              <a:rPr lang="zh-TW" altLang="en-US" sz="6400" b="1" dirty="0">
-                <a:solidFill>
-                  <a:srgbClr val="660033"/>
-                </a:solidFill>
-                <a:latin typeface="微軟正黑體" pitchFamily="34" charset="-120"/>
-                <a:ea typeface="微軟正黑體" pitchFamily="34" charset="-120"/>
-              </a:rPr>
-              <a:t>要</a:t>
-            </a:r>
-            <a:r>
-              <a:rPr lang="en-US" altLang="zh-TW" sz="6400" b="1" dirty="0">
-                <a:solidFill>
-                  <a:srgbClr val="660033"/>
-                </a:solidFill>
-                <a:latin typeface="微軟正黑體" pitchFamily="34" charset="-120"/>
-                <a:ea typeface="微軟正黑體" pitchFamily="34" charset="-120"/>
-              </a:rPr>
-              <a:t>  </a:t>
-            </a:r>
-            <a:r>
-              <a:rPr lang="zh-TW" altLang="en-US" sz="6400" b="1" dirty="0">
-                <a:solidFill>
-                  <a:srgbClr val="660033"/>
-                </a:solidFill>
-                <a:latin typeface="微軟正黑體" pitchFamily="34" charset="-120"/>
-                <a:ea typeface="微軟正黑體" pitchFamily="34" charset="-120"/>
-              </a:rPr>
-              <a:t>重</a:t>
-            </a:r>
-            <a:r>
-              <a:rPr lang="zh-TW" altLang="en-US" sz="6400" b="1" dirty="0">
-                <a:solidFill>
-                  <a:srgbClr val="660033"/>
-                </a:solidFill>
-                <a:latin typeface="微軟正黑體" pitchFamily="34" charset="-120"/>
-                <a:ea typeface="微軟正黑體" pitchFamily="34" charset="-120"/>
-              </a:rPr>
-              <a:t>要</a:t>
-            </a:r>
-            <a:r>
-              <a:rPr lang="zh-TW" altLang="en-US" sz="6400" b="1" dirty="0">
-                <a:solidFill>
-                  <a:srgbClr val="660033"/>
-                </a:solidFill>
-                <a:latin typeface="微軟正黑體" pitchFamily="34" charset="-120"/>
-                <a:ea typeface="微軟正黑體" pitchFamily="34" charset="-120"/>
-              </a:rPr>
-              <a:t>是</a:t>
+              <a:t>重要是</a:t>
             </a:r>
             <a:r>
               <a:rPr lang="zh-CN" altLang="en-US" sz="6400" b="1" dirty="0">
@@ -4825,7 +4986,7 @@
                 <a:latin typeface="微軟正黑體" pitchFamily="34" charset="-120"/>
                 <a:ea typeface="微軟正黑體" pitchFamily="34" charset="-120"/>
               </a:rPr>
-              <a:t>袮</a:t>
+              <a:t>祢</a:t>
             </a:r>
             <a:endParaRPr lang="en-US" altLang="zh-TW" sz="6400" b="1" dirty="0">
               <a:solidFill>
@@ -4833,6 +4994,51 @@
               </a:solidFill>
               <a:latin typeface="微軟正黑體" pitchFamily="34" charset="-120"/>
               <a:ea typeface="微軟正黑體" pitchFamily="34" charset="-120"/>
+            </a:endParaRPr>
+          </a:p>
+        </p:txBody>
+      </p:sp>
+      <p:sp>
+        <p:nvSpPr>
+          <p:cNvPr id="2" name="TextBox 1">
+            <a:extLst>
+              <a:ext uri="{FF2B5EF4-FFF2-40B4-BE49-F238E27FC236}">
+                <a16:creationId xmlns:a16="http://schemas.microsoft.com/office/drawing/2014/main" id="{10C3304A-16ED-6089-9396-5192FDA89897}"/>
+              </a:ext>
+            </a:extLst>
+          </p:cNvPr>
+          <p:cNvSpPr txBox="1"/>
+          <p:nvPr/>
+        </p:nvSpPr>
+        <p:spPr>
+          <a:xfrm>
+            <a:off x="4108" y="5229200"/>
+            <a:ext cx="12187892" cy="646331"/>
+          </a:xfrm>
+          <a:prstGeom prst="rect">
+            <a:avLst/>
+          </a:prstGeom>
+          <a:noFill/>
+        </p:spPr>
+        <p:txBody>
+          <a:bodyPr wrap="square" rtlCol="0">
+            <a:spAutoFit/>
+          </a:bodyPr>
+          <a:lstStyle/>
+          <a:p>
+            <a:pPr algn="ctr"/>
+            <a:r>
+              <a:rPr lang="en-US" sz="3600" b="1" dirty="0">
+                <a:solidFill>
+                  <a:srgbClr val="660033"/>
+                </a:solidFill>
+              </a:rPr>
+              <a:t>( 2 / 2 )</a:t>
+            </a:r>
+            <a:endParaRPr lang="vi-VN" sz="3600" b="1" dirty="0">
+              <a:solidFill>
+                <a:srgbClr val="660033"/>
+              </a:solidFill>
             </a:endParaRPr>
           </a:p>
         </p:txBody>
@@ -4900,7 +5106,17 @@
                 <a:latin typeface="微軟正黑體" pitchFamily="34" charset="-120"/>
                 <a:ea typeface="微軟正黑體" pitchFamily="34" charset="-120"/>
               </a:rPr>
-              <a:t>危險  困逼  憑</a:t>
+              <a:t>危險  困逼  憑藉</a:t>
+            </a:r>
+            <a:r>
+              <a:rPr lang="zh-CN" altLang="en-US" sz="6400" b="1" dirty="0">
+                <a:solidFill>
+                  <a:srgbClr val="660033"/>
+                </a:solidFill>
+                <a:latin typeface="微軟正黑體" pitchFamily="34" charset="-120"/>
+                <a:ea typeface="微軟正黑體" pitchFamily="34" charset="-120"/>
+              </a:rPr>
+              <a:t>祢</a:t>
             </a:r>
             <a:r>
               <a:rPr lang="zh-TW" altLang="en-US" sz="6400" b="1" dirty="0">
@@ -4910,37 +5126,7 @@
                 <a:latin typeface="微軟正黑體" pitchFamily="34" charset="-120"/>
                 <a:ea typeface="微軟正黑體" pitchFamily="34" charset="-120"/>
               </a:rPr>
-              <a:t>藉</a:t>
-            </a:r>
-            <a:r>
-              <a:rPr lang="zh-CN" altLang="en-US" sz="6400" b="1" dirty="0">
-                <a:solidFill>
-                  <a:srgbClr val="660033"/>
-                </a:solidFill>
-                <a:latin typeface="微軟正黑體" pitchFamily="34" charset="-120"/>
-                <a:ea typeface="微軟正黑體" pitchFamily="34" charset="-120"/>
-              </a:rPr>
-              <a:t>袮</a:t>
-            </a:r>
-            <a:r>
-              <a:rPr lang="zh-TW" altLang="en-US" sz="6400" b="1" dirty="0">
-                <a:solidFill>
-                  <a:srgbClr val="660033"/>
-                </a:solidFill>
-                <a:latin typeface="微軟正黑體" pitchFamily="34" charset="-120"/>
-                <a:ea typeface="微軟正黑體" pitchFamily="34" charset="-120"/>
-              </a:rPr>
-              <a:t>一</a:t>
-            </a:r>
-            <a:r>
-              <a:rPr lang="zh-TW" altLang="en-US" sz="6400" b="1" dirty="0">
-                <a:solidFill>
-                  <a:srgbClr val="660033"/>
-                </a:solidFill>
-                <a:latin typeface="微軟正黑體" pitchFamily="34" charset="-120"/>
-                <a:ea typeface="微軟正黑體" pitchFamily="34" charset="-120"/>
-              </a:rPr>
-              <a:t>一過渡</a:t>
+              <a:t>一一過渡</a:t>
             </a:r>
             <a:endParaRPr lang="en-US" altLang="zh-TW" sz="6400" b="1" dirty="0">
               <a:solidFill>
@@ -4972,7 +5158,7 @@
                 <a:latin typeface="微軟正黑體" pitchFamily="34" charset="-120"/>
                 <a:ea typeface="微軟正黑體" pitchFamily="34" charset="-120"/>
               </a:rPr>
-              <a:t>袮</a:t>
+              <a:t>祢</a:t>
             </a:r>
             <a:r>
               <a:rPr lang="zh-TW" altLang="en-US" sz="6400" b="1" dirty="0">
@@ -4982,17 +5168,7 @@
                 <a:latin typeface="微軟正黑體" pitchFamily="34" charset="-120"/>
                 <a:ea typeface="微軟正黑體" pitchFamily="34" charset="-120"/>
               </a:rPr>
-              <a:t>恩</a:t>
-            </a:r>
-            <a:r>
-              <a:rPr lang="zh-TW" altLang="en-US" sz="6400" b="1" dirty="0">
-                <a:solidFill>
-                  <a:srgbClr val="660033"/>
-                </a:solidFill>
-                <a:latin typeface="微軟正黑體" pitchFamily="34" charset="-120"/>
-                <a:ea typeface="微軟正黑體" pitchFamily="34" charset="-120"/>
-              </a:rPr>
-              <a:t>手使這家溫馨倍添</a:t>
+              <a:t>恩手使這家溫馨倍添</a:t>
             </a:r>
             <a:endParaRPr lang="en-US" altLang="zh-TW" sz="6400" b="1" dirty="0">
               <a:solidFill>
@@ -5000,6 +5176,51 @@
               </a:solidFill>
               <a:latin typeface="微軟正黑體" pitchFamily="34" charset="-120"/>
               <a:ea typeface="微軟正黑體" pitchFamily="34" charset="-120"/>
+            </a:endParaRPr>
+          </a:p>
+        </p:txBody>
+      </p:sp>
+      <p:sp>
+        <p:nvSpPr>
+          <p:cNvPr id="2" name="TextBox 1">
+            <a:extLst>
+              <a:ext uri="{FF2B5EF4-FFF2-40B4-BE49-F238E27FC236}">
+                <a16:creationId xmlns:a16="http://schemas.microsoft.com/office/drawing/2014/main" id="{B5D04C8D-052F-9338-AD3E-23370BD755EA}"/>
+              </a:ext>
+            </a:extLst>
+          </p:cNvPr>
+          <p:cNvSpPr txBox="1"/>
+          <p:nvPr/>
+        </p:nvSpPr>
+        <p:spPr>
+          <a:xfrm>
+            <a:off x="4108" y="5229200"/>
+            <a:ext cx="12187892" cy="646331"/>
+          </a:xfrm>
+          <a:prstGeom prst="rect">
+            <a:avLst/>
+          </a:prstGeom>
+          <a:noFill/>
+        </p:spPr>
+        <p:txBody>
+          <a:bodyPr wrap="square" rtlCol="0">
+            <a:spAutoFit/>
+          </a:bodyPr>
+          <a:lstStyle/>
+          <a:p>
+            <a:pPr algn="ctr"/>
+            <a:r>
+              <a:rPr lang="en-US" sz="3600" b="1" dirty="0">
+                <a:solidFill>
+                  <a:srgbClr val="660033"/>
+                </a:solidFill>
+              </a:rPr>
+              <a:t>( 2 / 2 )</a:t>
+            </a:r>
+            <a:endParaRPr lang="vi-VN" sz="3600" b="1" dirty="0">
+              <a:solidFill>
+                <a:srgbClr val="660033"/>
+              </a:solidFill>
             </a:endParaRPr>
           </a:p>
         </p:txBody>
